--- a/out/site/files/WISE_L04_수업.pptx
+++ b/out/site/files/WISE_L04_수업.pptx
@@ -5949,7 +5949,7 @@
                 </a:solidFill>
                 <a:latin typeface="맑은 고딕"/>
               </a:rPr>
-              <a:t>· 카드 3칸 분류판</a:t>
+              <a:t>· 카드 세 칸으로 나누기</a:t>
             </a:r>
           </a:p>
           <a:p>
@@ -5965,7 +5965,7 @@
                 </a:solidFill>
                 <a:latin typeface="맑은 고딕"/>
               </a:rPr>
-              <a:t>· 근거 쓰기</a:t>
+              <a:t>· 까닭 쓰기</a:t>
             </a:r>
           </a:p>
           <a:p>

--- a/out/site/files/WISE_L04_수업.pptx
+++ b/out/site/files/WISE_L04_수업.pptx
@@ -16,6 +16,15 @@
     <p:sldId id="264" r:id="rId16"/>
     <p:sldId id="265" r:id="rId17"/>
     <p:sldId id="266" r:id="rId18"/>
+    <p:sldId id="267" r:id="rId19"/>
+    <p:sldId id="268" r:id="rId20"/>
+    <p:sldId id="269" r:id="rId21"/>
+    <p:sldId id="270" r:id="rId22"/>
+    <p:sldId id="271" r:id="rId23"/>
+    <p:sldId id="272" r:id="rId24"/>
+    <p:sldId id="273" r:id="rId25"/>
+    <p:sldId id="274" r:id="rId26"/>
+    <p:sldId id="275" r:id="rId27"/>
   </p:sldIdLst>
   <p:sldSz cx="12191695" cy="6858000" type="screen4x3"/>
   <p:notesSz cx="6858000" cy="9144000"/>
@@ -678,7 +687,602 @@
           <a:lstStyle/>
           <a:p>
             <a:r>
-              <a:t>오늘 배운 것을 학생이 한 문장으로 말하게 한다.</a:t>
+              <a:t>수업 시작 전에 방을 만들어 둔다.</a:t>
+            </a:r>
+          </a:p>
+          <a:p>
+            <a:r>
+              <a:t>학생에게는 방 번호와 닉네임만 알려 준다. 이름을 묻지 않는다.</a:t>
+            </a:r>
+          </a:p>
+        </p:txBody>
+      </p:sp>
+      <p:sp>
+        <p:nvSpPr>
+          <p:cNvPr id="4" name="Slide Number Placeholder 3"/>
+          <p:cNvSpPr>
+            <a:spLocks noGrp="1"/>
+          </p:cNvSpPr>
+          <p:nvPr>
+            <p:ph type="sldNum" idx="5" sz="quarter"/>
+          </p:nvPr>
+        </p:nvSpPr>
+        <p:spPr/>
+      </p:sp>
+    </p:spTree>
+  </p:cSld>
+  <p:clrMapOvr>
+    <a:masterClrMapping/>
+  </p:clrMapOvr>
+</p:notes>
+</file>
+
+<file path=ppt/notesSlides/notesSlide12.xml><?xml version="1.0" encoding="utf-8"?>
+<p:notes xmlns:a="http://schemas.openxmlformats.org/drawingml/2006/main" xmlns:p="http://schemas.openxmlformats.org/presentationml/2006/main" xmlns:r="http://schemas.openxmlformats.org/officeDocument/2006/relationships">
+  <p:cSld>
+    <p:spTree>
+      <p:nvGrpSpPr>
+        <p:cNvPr id="1" name=""/>
+        <p:cNvGrpSpPr/>
+        <p:nvPr/>
+      </p:nvGrpSpPr>
+      <p:grpSpPr>
+        <a:xfrm>
+          <a:off x="0" y="0"/>
+          <a:ext cx="0" cy="0"/>
+          <a:chOff x="0" y="0"/>
+          <a:chExt cx="0" cy="0"/>
+        </a:xfrm>
+      </p:grpSpPr>
+      <p:sp>
+        <p:nvSpPr>
+          <p:cNvPr id="2" name="Slide Image Placeholder 1"/>
+          <p:cNvSpPr>
+            <a:spLocks noGrp="1"/>
+          </p:cNvSpPr>
+          <p:nvPr>
+            <p:ph type="sldImg" idx="2"/>
+          </p:nvPr>
+        </p:nvSpPr>
+        <p:spPr/>
+      </p:sp>
+      <p:sp>
+        <p:nvSpPr>
+          <p:cNvPr id="3" name="Notes Placeholder 2"/>
+          <p:cNvSpPr>
+            <a:spLocks noGrp="1"/>
+          </p:cNvSpPr>
+          <p:nvPr>
+            <p:ph type="body" idx="3" sz="quarter"/>
+          </p:nvPr>
+        </p:nvSpPr>
+        <p:spPr/>
+        <p:txBody>
+          <a:bodyPr/>
+          <a:lstStyle/>
+          <a:p>
+            <a:r>
+              <a:t>학생 화면을 띄워 놓고 함께 입장한다.</a:t>
+            </a:r>
+          </a:p>
+        </p:txBody>
+      </p:sp>
+      <p:sp>
+        <p:nvSpPr>
+          <p:cNvPr id="4" name="Slide Number Placeholder 3"/>
+          <p:cNvSpPr>
+            <a:spLocks noGrp="1"/>
+          </p:cNvSpPr>
+          <p:nvPr>
+            <p:ph type="sldNum" idx="5" sz="quarter"/>
+          </p:nvPr>
+        </p:nvSpPr>
+        <p:spPr/>
+      </p:sp>
+    </p:spTree>
+  </p:cSld>
+  <p:clrMapOvr>
+    <a:masterClrMapping/>
+  </p:clrMapOvr>
+</p:notes>
+</file>
+
+<file path=ppt/notesSlides/notesSlide13.xml><?xml version="1.0" encoding="utf-8"?>
+<p:notes xmlns:a="http://schemas.openxmlformats.org/drawingml/2006/main" xmlns:p="http://schemas.openxmlformats.org/presentationml/2006/main" xmlns:r="http://schemas.openxmlformats.org/officeDocument/2006/relationships">
+  <p:cSld>
+    <p:spTree>
+      <p:nvGrpSpPr>
+        <p:cNvPr id="1" name=""/>
+        <p:cNvGrpSpPr/>
+        <p:nvPr/>
+      </p:nvGrpSpPr>
+      <p:grpSpPr>
+        <a:xfrm>
+          <a:off x="0" y="0"/>
+          <a:ext cx="0" cy="0"/>
+          <a:chOff x="0" y="0"/>
+          <a:chExt cx="0" cy="0"/>
+        </a:xfrm>
+      </p:grpSpPr>
+      <p:sp>
+        <p:nvSpPr>
+          <p:cNvPr id="2" name="Slide Image Placeholder 1"/>
+          <p:cNvSpPr>
+            <a:spLocks noGrp="1"/>
+          </p:cNvSpPr>
+          <p:nvPr>
+            <p:ph type="sldImg" idx="2"/>
+          </p:nvPr>
+        </p:nvSpPr>
+        <p:spPr/>
+      </p:sp>
+      <p:sp>
+        <p:nvSpPr>
+          <p:cNvPr id="3" name="Notes Placeholder 2"/>
+          <p:cNvSpPr>
+            <a:spLocks noGrp="1"/>
+          </p:cNvSpPr>
+          <p:nvPr>
+            <p:ph type="body" idx="3" sz="quarter"/>
+          </p:nvPr>
+        </p:nvSpPr>
+        <p:spPr/>
+        <p:txBody>
+          <a:bodyPr/>
+          <a:lstStyle/>
+          <a:p>
+            <a:r>
+              <a:t>이 화면에서 학생이 무엇을 하는지 먼저 말해 준다.</a:t>
+            </a:r>
+          </a:p>
+          <a:p>
+            <a:r>
+              <a:t>판단이 갈리는 자리에서 까닭을 묻는다.</a:t>
+            </a:r>
+          </a:p>
+        </p:txBody>
+      </p:sp>
+      <p:sp>
+        <p:nvSpPr>
+          <p:cNvPr id="4" name="Slide Number Placeholder 3"/>
+          <p:cNvSpPr>
+            <a:spLocks noGrp="1"/>
+          </p:cNvSpPr>
+          <p:nvPr>
+            <p:ph type="sldNum" idx="5" sz="quarter"/>
+          </p:nvPr>
+        </p:nvSpPr>
+        <p:spPr/>
+      </p:sp>
+    </p:spTree>
+  </p:cSld>
+  <p:clrMapOvr>
+    <a:masterClrMapping/>
+  </p:clrMapOvr>
+</p:notes>
+</file>
+
+<file path=ppt/notesSlides/notesSlide14.xml><?xml version="1.0" encoding="utf-8"?>
+<p:notes xmlns:a="http://schemas.openxmlformats.org/drawingml/2006/main" xmlns:p="http://schemas.openxmlformats.org/presentationml/2006/main" xmlns:r="http://schemas.openxmlformats.org/officeDocument/2006/relationships">
+  <p:cSld>
+    <p:spTree>
+      <p:nvGrpSpPr>
+        <p:cNvPr id="1" name=""/>
+        <p:cNvGrpSpPr/>
+        <p:nvPr/>
+      </p:nvGrpSpPr>
+      <p:grpSpPr>
+        <a:xfrm>
+          <a:off x="0" y="0"/>
+          <a:ext cx="0" cy="0"/>
+          <a:chOff x="0" y="0"/>
+          <a:chExt cx="0" cy="0"/>
+        </a:xfrm>
+      </p:grpSpPr>
+      <p:sp>
+        <p:nvSpPr>
+          <p:cNvPr id="2" name="Slide Image Placeholder 1"/>
+          <p:cNvSpPr>
+            <a:spLocks noGrp="1"/>
+          </p:cNvSpPr>
+          <p:nvPr>
+            <p:ph type="sldImg" idx="2"/>
+          </p:nvPr>
+        </p:nvSpPr>
+        <p:spPr/>
+      </p:sp>
+      <p:sp>
+        <p:nvSpPr>
+          <p:cNvPr id="3" name="Notes Placeholder 2"/>
+          <p:cNvSpPr>
+            <a:spLocks noGrp="1"/>
+          </p:cNvSpPr>
+          <p:nvPr>
+            <p:ph type="body" idx="3" sz="quarter"/>
+          </p:nvPr>
+        </p:nvSpPr>
+        <p:spPr/>
+        <p:txBody>
+          <a:bodyPr/>
+          <a:lstStyle/>
+          <a:p>
+            <a:r>
+              <a:t>이 화면에서 학생이 무엇을 하는지 먼저 말해 준다.</a:t>
+            </a:r>
+          </a:p>
+          <a:p>
+            <a:r>
+              <a:t>판단이 갈리는 자리에서 까닭을 묻는다.</a:t>
+            </a:r>
+          </a:p>
+        </p:txBody>
+      </p:sp>
+      <p:sp>
+        <p:nvSpPr>
+          <p:cNvPr id="4" name="Slide Number Placeholder 3"/>
+          <p:cNvSpPr>
+            <a:spLocks noGrp="1"/>
+          </p:cNvSpPr>
+          <p:nvPr>
+            <p:ph type="sldNum" idx="5" sz="quarter"/>
+          </p:nvPr>
+        </p:nvSpPr>
+        <p:spPr/>
+      </p:sp>
+    </p:spTree>
+  </p:cSld>
+  <p:clrMapOvr>
+    <a:masterClrMapping/>
+  </p:clrMapOvr>
+</p:notes>
+</file>
+
+<file path=ppt/notesSlides/notesSlide15.xml><?xml version="1.0" encoding="utf-8"?>
+<p:notes xmlns:a="http://schemas.openxmlformats.org/drawingml/2006/main" xmlns:p="http://schemas.openxmlformats.org/presentationml/2006/main" xmlns:r="http://schemas.openxmlformats.org/officeDocument/2006/relationships">
+  <p:cSld>
+    <p:spTree>
+      <p:nvGrpSpPr>
+        <p:cNvPr id="1" name=""/>
+        <p:cNvGrpSpPr/>
+        <p:nvPr/>
+      </p:nvGrpSpPr>
+      <p:grpSpPr>
+        <a:xfrm>
+          <a:off x="0" y="0"/>
+          <a:ext cx="0" cy="0"/>
+          <a:chOff x="0" y="0"/>
+          <a:chExt cx="0" cy="0"/>
+        </a:xfrm>
+      </p:grpSpPr>
+      <p:sp>
+        <p:nvSpPr>
+          <p:cNvPr id="2" name="Slide Image Placeholder 1"/>
+          <p:cNvSpPr>
+            <a:spLocks noGrp="1"/>
+          </p:cNvSpPr>
+          <p:nvPr>
+            <p:ph type="sldImg" idx="2"/>
+          </p:nvPr>
+        </p:nvSpPr>
+        <p:spPr/>
+      </p:sp>
+      <p:sp>
+        <p:nvSpPr>
+          <p:cNvPr id="3" name="Notes Placeholder 2"/>
+          <p:cNvSpPr>
+            <a:spLocks noGrp="1"/>
+          </p:cNvSpPr>
+          <p:nvPr>
+            <p:ph type="body" idx="3" sz="quarter"/>
+          </p:nvPr>
+        </p:nvSpPr>
+        <p:spPr/>
+        <p:txBody>
+          <a:bodyPr/>
+          <a:lstStyle/>
+          <a:p>
+            <a:r>
+              <a:t>이 화면에서 학생이 무엇을 하는지 먼저 말해 준다.</a:t>
+            </a:r>
+          </a:p>
+          <a:p>
+            <a:r>
+              <a:t>판단이 갈리는 자리에서 까닭을 묻는다.</a:t>
+            </a:r>
+          </a:p>
+        </p:txBody>
+      </p:sp>
+      <p:sp>
+        <p:nvSpPr>
+          <p:cNvPr id="4" name="Slide Number Placeholder 3"/>
+          <p:cNvSpPr>
+            <a:spLocks noGrp="1"/>
+          </p:cNvSpPr>
+          <p:nvPr>
+            <p:ph type="sldNum" idx="5" sz="quarter"/>
+          </p:nvPr>
+        </p:nvSpPr>
+        <p:spPr/>
+      </p:sp>
+    </p:spTree>
+  </p:cSld>
+  <p:clrMapOvr>
+    <a:masterClrMapping/>
+  </p:clrMapOvr>
+</p:notes>
+</file>
+
+<file path=ppt/notesSlides/notesSlide16.xml><?xml version="1.0" encoding="utf-8"?>
+<p:notes xmlns:a="http://schemas.openxmlformats.org/drawingml/2006/main" xmlns:p="http://schemas.openxmlformats.org/presentationml/2006/main" xmlns:r="http://schemas.openxmlformats.org/officeDocument/2006/relationships">
+  <p:cSld>
+    <p:spTree>
+      <p:nvGrpSpPr>
+        <p:cNvPr id="1" name=""/>
+        <p:cNvGrpSpPr/>
+        <p:nvPr/>
+      </p:nvGrpSpPr>
+      <p:grpSpPr>
+        <a:xfrm>
+          <a:off x="0" y="0"/>
+          <a:ext cx="0" cy="0"/>
+          <a:chOff x="0" y="0"/>
+          <a:chExt cx="0" cy="0"/>
+        </a:xfrm>
+      </p:grpSpPr>
+      <p:sp>
+        <p:nvSpPr>
+          <p:cNvPr id="2" name="Slide Image Placeholder 1"/>
+          <p:cNvSpPr>
+            <a:spLocks noGrp="1"/>
+          </p:cNvSpPr>
+          <p:nvPr>
+            <p:ph type="sldImg" idx="2"/>
+          </p:nvPr>
+        </p:nvSpPr>
+        <p:spPr/>
+      </p:sp>
+      <p:sp>
+        <p:nvSpPr>
+          <p:cNvPr id="3" name="Notes Placeholder 2"/>
+          <p:cNvSpPr>
+            <a:spLocks noGrp="1"/>
+          </p:cNvSpPr>
+          <p:nvPr>
+            <p:ph type="body" idx="3" sz="quarter"/>
+          </p:nvPr>
+        </p:nvSpPr>
+        <p:spPr/>
+        <p:txBody>
+          <a:bodyPr/>
+          <a:lstStyle/>
+          <a:p>
+            <a:r>
+              <a:t>이 화면에서 학생이 무엇을 하는지 먼저 말해 준다.</a:t>
+            </a:r>
+          </a:p>
+          <a:p>
+            <a:r>
+              <a:t>판단이 갈리는 자리에서 까닭을 묻는다.</a:t>
+            </a:r>
+          </a:p>
+        </p:txBody>
+      </p:sp>
+      <p:sp>
+        <p:nvSpPr>
+          <p:cNvPr id="4" name="Slide Number Placeholder 3"/>
+          <p:cNvSpPr>
+            <a:spLocks noGrp="1"/>
+          </p:cNvSpPr>
+          <p:nvPr>
+            <p:ph type="sldNum" idx="5" sz="quarter"/>
+          </p:nvPr>
+        </p:nvSpPr>
+        <p:spPr/>
+      </p:sp>
+    </p:spTree>
+  </p:cSld>
+  <p:clrMapOvr>
+    <a:masterClrMapping/>
+  </p:clrMapOvr>
+</p:notes>
+</file>
+
+<file path=ppt/notesSlides/notesSlide17.xml><?xml version="1.0" encoding="utf-8"?>
+<p:notes xmlns:a="http://schemas.openxmlformats.org/drawingml/2006/main" xmlns:p="http://schemas.openxmlformats.org/presentationml/2006/main" xmlns:r="http://schemas.openxmlformats.org/officeDocument/2006/relationships">
+  <p:cSld>
+    <p:spTree>
+      <p:nvGrpSpPr>
+        <p:cNvPr id="1" name=""/>
+        <p:cNvGrpSpPr/>
+        <p:nvPr/>
+      </p:nvGrpSpPr>
+      <p:grpSpPr>
+        <a:xfrm>
+          <a:off x="0" y="0"/>
+          <a:ext cx="0" cy="0"/>
+          <a:chOff x="0" y="0"/>
+          <a:chExt cx="0" cy="0"/>
+        </a:xfrm>
+      </p:grpSpPr>
+      <p:sp>
+        <p:nvSpPr>
+          <p:cNvPr id="2" name="Slide Image Placeholder 1"/>
+          <p:cNvSpPr>
+            <a:spLocks noGrp="1"/>
+          </p:cNvSpPr>
+          <p:nvPr>
+            <p:ph type="sldImg" idx="2"/>
+          </p:nvPr>
+        </p:nvSpPr>
+        <p:spPr/>
+      </p:sp>
+      <p:sp>
+        <p:nvSpPr>
+          <p:cNvPr id="3" name="Notes Placeholder 2"/>
+          <p:cNvSpPr>
+            <a:spLocks noGrp="1"/>
+          </p:cNvSpPr>
+          <p:nvPr>
+            <p:ph type="body" idx="3" sz="quarter"/>
+          </p:nvPr>
+        </p:nvSpPr>
+        <p:spPr/>
+        <p:txBody>
+          <a:bodyPr/>
+          <a:lstStyle/>
+          <a:p>
+            <a:r>
+              <a:t>이 화면에서 학생이 무엇을 하는지 먼저 말해 준다.</a:t>
+            </a:r>
+          </a:p>
+          <a:p>
+            <a:r>
+              <a:t>판단이 갈리는 자리에서 까닭을 묻는다.</a:t>
+            </a:r>
+          </a:p>
+        </p:txBody>
+      </p:sp>
+      <p:sp>
+        <p:nvSpPr>
+          <p:cNvPr id="4" name="Slide Number Placeholder 3"/>
+          <p:cNvSpPr>
+            <a:spLocks noGrp="1"/>
+          </p:cNvSpPr>
+          <p:nvPr>
+            <p:ph type="sldNum" idx="5" sz="quarter"/>
+          </p:nvPr>
+        </p:nvSpPr>
+        <p:spPr/>
+      </p:sp>
+    </p:spTree>
+  </p:cSld>
+  <p:clrMapOvr>
+    <a:masterClrMapping/>
+  </p:clrMapOvr>
+</p:notes>
+</file>
+
+<file path=ppt/notesSlides/notesSlide18.xml><?xml version="1.0" encoding="utf-8"?>
+<p:notes xmlns:a="http://schemas.openxmlformats.org/drawingml/2006/main" xmlns:p="http://schemas.openxmlformats.org/presentationml/2006/main" xmlns:r="http://schemas.openxmlformats.org/officeDocument/2006/relationships">
+  <p:cSld>
+    <p:spTree>
+      <p:nvGrpSpPr>
+        <p:cNvPr id="1" name=""/>
+        <p:cNvGrpSpPr/>
+        <p:nvPr/>
+      </p:nvGrpSpPr>
+      <p:grpSpPr>
+        <a:xfrm>
+          <a:off x="0" y="0"/>
+          <a:ext cx="0" cy="0"/>
+          <a:chOff x="0" y="0"/>
+          <a:chExt cx="0" cy="0"/>
+        </a:xfrm>
+      </p:grpSpPr>
+      <p:sp>
+        <p:nvSpPr>
+          <p:cNvPr id="2" name="Slide Image Placeholder 1"/>
+          <p:cNvSpPr>
+            <a:spLocks noGrp="1"/>
+          </p:cNvSpPr>
+          <p:nvPr>
+            <p:ph type="sldImg" idx="2"/>
+          </p:nvPr>
+        </p:nvSpPr>
+        <p:spPr/>
+      </p:sp>
+      <p:sp>
+        <p:nvSpPr>
+          <p:cNvPr id="3" name="Notes Placeholder 2"/>
+          <p:cNvSpPr>
+            <a:spLocks noGrp="1"/>
+          </p:cNvSpPr>
+          <p:nvPr>
+            <p:ph type="body" idx="3" sz="quarter"/>
+          </p:nvPr>
+        </p:nvSpPr>
+        <p:spPr/>
+        <p:txBody>
+          <a:bodyPr/>
+          <a:lstStyle/>
+          <a:p>
+            <a:r>
+              <a:t>이 화면에서 학생이 무엇을 하는지 먼저 말해 준다.</a:t>
+            </a:r>
+          </a:p>
+          <a:p>
+            <a:r>
+              <a:t>판단이 갈리는 자리에서 까닭을 묻는다.</a:t>
+            </a:r>
+          </a:p>
+        </p:txBody>
+      </p:sp>
+      <p:sp>
+        <p:nvSpPr>
+          <p:cNvPr id="4" name="Slide Number Placeholder 3"/>
+          <p:cNvSpPr>
+            <a:spLocks noGrp="1"/>
+          </p:cNvSpPr>
+          <p:nvPr>
+            <p:ph type="sldNum" idx="5" sz="quarter"/>
+          </p:nvPr>
+        </p:nvSpPr>
+        <p:spPr/>
+      </p:sp>
+    </p:spTree>
+  </p:cSld>
+  <p:clrMapOvr>
+    <a:masterClrMapping/>
+  </p:clrMapOvr>
+</p:notes>
+</file>
+
+<file path=ppt/notesSlides/notesSlide19.xml><?xml version="1.0" encoding="utf-8"?>
+<p:notes xmlns:a="http://schemas.openxmlformats.org/drawingml/2006/main" xmlns:p="http://schemas.openxmlformats.org/presentationml/2006/main" xmlns:r="http://schemas.openxmlformats.org/officeDocument/2006/relationships">
+  <p:cSld>
+    <p:spTree>
+      <p:nvGrpSpPr>
+        <p:cNvPr id="1" name=""/>
+        <p:cNvGrpSpPr/>
+        <p:nvPr/>
+      </p:nvGrpSpPr>
+      <p:grpSpPr>
+        <a:xfrm>
+          <a:off x="0" y="0"/>
+          <a:ext cx="0" cy="0"/>
+          <a:chOff x="0" y="0"/>
+          <a:chExt cx="0" cy="0"/>
+        </a:xfrm>
+      </p:grpSpPr>
+      <p:sp>
+        <p:nvSpPr>
+          <p:cNvPr id="2" name="Slide Image Placeholder 1"/>
+          <p:cNvSpPr>
+            <a:spLocks noGrp="1"/>
+          </p:cNvSpPr>
+          <p:nvPr>
+            <p:ph type="sldImg" idx="2"/>
+          </p:nvPr>
+        </p:nvSpPr>
+        <p:spPr/>
+      </p:sp>
+      <p:sp>
+        <p:nvSpPr>
+          <p:cNvPr id="3" name="Notes Placeholder 2"/>
+          <p:cNvSpPr>
+            <a:spLocks noGrp="1"/>
+          </p:cNvSpPr>
+          <p:nvPr>
+            <p:ph type="body" idx="3" sz="quarter"/>
+          </p:nvPr>
+        </p:nvSpPr>
+        <p:spPr/>
+        <p:txBody>
+          <a:bodyPr/>
+          <a:lstStyle/>
+          <a:p>
+            <a:r>
+              <a:t>제출이 모이면 갈린 항목부터 함께 본다.</a:t>
             </a:r>
           </a:p>
         </p:txBody>
@@ -749,6 +1353,76 @@
           <a:p>
             <a:r>
               <a:t>학습 문제를 함께 소리 내어 읽는다.</a:t>
+            </a:r>
+          </a:p>
+        </p:txBody>
+      </p:sp>
+      <p:sp>
+        <p:nvSpPr>
+          <p:cNvPr id="4" name="Slide Number Placeholder 3"/>
+          <p:cNvSpPr>
+            <a:spLocks noGrp="1"/>
+          </p:cNvSpPr>
+          <p:nvPr>
+            <p:ph type="sldNum" idx="5" sz="quarter"/>
+          </p:nvPr>
+        </p:nvSpPr>
+        <p:spPr/>
+      </p:sp>
+    </p:spTree>
+  </p:cSld>
+  <p:clrMapOvr>
+    <a:masterClrMapping/>
+  </p:clrMapOvr>
+</p:notes>
+</file>
+
+<file path=ppt/notesSlides/notesSlide20.xml><?xml version="1.0" encoding="utf-8"?>
+<p:notes xmlns:a="http://schemas.openxmlformats.org/drawingml/2006/main" xmlns:p="http://schemas.openxmlformats.org/presentationml/2006/main" xmlns:r="http://schemas.openxmlformats.org/officeDocument/2006/relationships">
+  <p:cSld>
+    <p:spTree>
+      <p:nvGrpSpPr>
+        <p:cNvPr id="1" name=""/>
+        <p:cNvGrpSpPr/>
+        <p:nvPr/>
+      </p:nvGrpSpPr>
+      <p:grpSpPr>
+        <a:xfrm>
+          <a:off x="0" y="0"/>
+          <a:ext cx="0" cy="0"/>
+          <a:chOff x="0" y="0"/>
+          <a:chExt cx="0" cy="0"/>
+        </a:xfrm>
+      </p:grpSpPr>
+      <p:sp>
+        <p:nvSpPr>
+          <p:cNvPr id="2" name="Slide Image Placeholder 1"/>
+          <p:cNvSpPr>
+            <a:spLocks noGrp="1"/>
+          </p:cNvSpPr>
+          <p:nvPr>
+            <p:ph type="sldImg" idx="2"/>
+          </p:nvPr>
+        </p:nvSpPr>
+        <p:spPr/>
+      </p:sp>
+      <p:sp>
+        <p:nvSpPr>
+          <p:cNvPr id="3" name="Notes Placeholder 2"/>
+          <p:cNvSpPr>
+            <a:spLocks noGrp="1"/>
+          </p:cNvSpPr>
+          <p:nvPr>
+            <p:ph type="body" idx="3" sz="quarter"/>
+          </p:nvPr>
+        </p:nvSpPr>
+        <p:spPr/>
+        <p:txBody>
+          <a:bodyPr/>
+          <a:lstStyle/>
+          <a:p>
+            <a:r>
+              <a:t>오늘 배운 것을 학생이 한 문장으로 말하게 한다.</a:t>
             </a:r>
           </a:p>
         </p:txBody>
@@ -4879,7 +5553,7 @@
         </p:nvSpPr>
         <p:spPr>
           <a:xfrm>
-            <a:off x="822960" y="914400"/>
+            <a:off x="822960" y="731520"/>
             <a:ext cx="10545775" cy="548640"/>
           </a:xfrm>
           <a:prstGeom prst="rect">
@@ -4905,7 +5579,1534 @@
                 </a:solidFill>
                 <a:latin typeface="맑은 고딕"/>
               </a:rPr>
-              <a:t>오늘의 배움</a:t>
+              <a:t>웹앱으로 합니다</a:t>
+            </a:r>
+          </a:p>
+        </p:txBody>
+      </p:sp>
+      <p:sp>
+        <p:nvSpPr>
+          <p:cNvPr id="4" name="TextBox 3"/>
+          <p:cNvSpPr txBox="1"/>
+          <p:nvPr/>
+        </p:nvSpPr>
+        <p:spPr>
+          <a:xfrm>
+            <a:off x="822960" y="1463040"/>
+            <a:ext cx="6766560" cy="1097280"/>
+          </a:xfrm>
+          <a:prstGeom prst="rect">
+            <a:avLst/>
+          </a:prstGeom>
+          <a:noFill/>
+        </p:spPr>
+        <p:txBody>
+          <a:bodyPr wrap="square" anchor="t">
+            <a:spAutoFit/>
+          </a:bodyPr>
+          <a:lstStyle/>
+          <a:p>
+            <a:pPr algn="l">
+              <a:lnSpc>
+                <a:spcPct val="125000"/>
+              </a:lnSpc>
+            </a:pPr>
+            <a:r>
+              <a:rPr sz="4000" b="1">
+                <a:solidFill>
+                  <a:srgbClr val="1F2937"/>
+                </a:solidFill>
+                <a:latin typeface="맑은 고딕"/>
+              </a:rPr>
+              <a:t>정보 분류 카드</a:t>
+            </a:r>
+          </a:p>
+        </p:txBody>
+      </p:sp>
+      <p:sp>
+        <p:nvSpPr>
+          <p:cNvPr id="5" name="TextBox 4"/>
+          <p:cNvSpPr txBox="1"/>
+          <p:nvPr/>
+        </p:nvSpPr>
+        <p:spPr>
+          <a:xfrm>
+            <a:off x="822960" y="2651760"/>
+            <a:ext cx="6766560" cy="2194560"/>
+          </a:xfrm>
+          <a:prstGeom prst="rect">
+            <a:avLst/>
+          </a:prstGeom>
+          <a:noFill/>
+        </p:spPr>
+        <p:txBody>
+          <a:bodyPr wrap="square" anchor="t">
+            <a:spAutoFit/>
+          </a:bodyPr>
+          <a:lstStyle/>
+          <a:p>
+            <a:pPr algn="l">
+              <a:lnSpc>
+                <a:spcPct val="150000"/>
+              </a:lnSpc>
+            </a:pPr>
+            <a:r>
+              <a:rPr sz="1800" b="0">
+                <a:solidFill>
+                  <a:srgbClr val="1F2937"/>
+                </a:solidFill>
+                <a:latin typeface="맑은 고딕"/>
+              </a:rPr>
+              <a:t>정보 카드 24장을 입력 가능·조건부·입력 금지로 끌어다 놓고, 근거를 적어 학급 결과와 비교한다.</a:t>
+            </a:r>
+          </a:p>
+          <a:p>
+            <a:pPr algn="l">
+              <a:lnSpc>
+                <a:spcPct val="150000"/>
+              </a:lnSpc>
+            </a:pPr>
+            <a:r>
+              <a:rPr sz="1800" b="0">
+                <a:solidFill>
+                  <a:srgbClr val="1F2937"/>
+                </a:solidFill>
+                <a:latin typeface="맑은 고딕"/>
+              </a:rPr>
+              <a:t>수업 전에 선생님 화면 → 새 방 만들기 → 방 번호를 칠판에 적는다.</a:t>
+            </a:r>
+          </a:p>
+          <a:p>
+            <a:pPr algn="l">
+              <a:lnSpc>
+                <a:spcPct val="150000"/>
+              </a:lnSpc>
+            </a:pPr>
+            <a:r>
+              <a:rPr sz="1800" b="0">
+                <a:solidFill>
+                  <a:srgbClr val="1F2937"/>
+                </a:solidFill>
+                <a:latin typeface="맑은 고딕"/>
+              </a:rPr>
+              <a:t>학생은 QR 을 찍거나 주소를 열고 방 번호와 닉네임을 넣는다.</a:t>
+            </a:r>
+          </a:p>
+          <a:p>
+            <a:pPr algn="l">
+              <a:lnSpc>
+                <a:spcPct val="150000"/>
+              </a:lnSpc>
+            </a:pPr>
+            <a:r>
+              <a:rPr sz="1800" b="0">
+                <a:solidFill>
+                  <a:srgbClr val="1F2937"/>
+                </a:solidFill>
+                <a:latin typeface="맑은 고딕"/>
+              </a:rPr>
+              <a:t>https://legoschool.github.io/wise-ai/webapp/L04/</a:t>
+            </a:r>
+          </a:p>
+        </p:txBody>
+      </p:sp>
+      <p:pic>
+        <p:nvPicPr>
+          <p:cNvPr id="6" name="Picture 5" descr="L04.png"/>
+          <p:cNvPicPr>
+            <a:picLocks noChangeAspect="1"/>
+          </p:cNvPicPr>
+          <p:nvPr/>
+        </p:nvPicPr>
+        <p:blipFill>
+          <a:blip r:embed="rId2"/>
+          <a:stretch>
+            <a:fillRect/>
+          </a:stretch>
+        </p:blipFill>
+        <p:spPr>
+          <a:xfrm>
+            <a:off x="8412480" y="1828800"/>
+            <a:ext cx="2743200" cy="2743200"/>
+          </a:xfrm>
+          <a:prstGeom prst="rect">
+            <a:avLst/>
+          </a:prstGeom>
+        </p:spPr>
+      </p:pic>
+    </p:spTree>
+  </p:cSld>
+  <p:clrMapOvr>
+    <a:masterClrMapping/>
+  </p:clrMapOvr>
+</p:sld>
+</file>
+
+<file path=ppt/slides/slide12.xml><?xml version="1.0" encoding="utf-8"?>
+<p:sld xmlns:a="http://schemas.openxmlformats.org/drawingml/2006/main" xmlns:p="http://schemas.openxmlformats.org/presentationml/2006/main" xmlns:r="http://schemas.openxmlformats.org/officeDocument/2006/relationships">
+  <p:cSld>
+    <p:spTree>
+      <p:nvGrpSpPr>
+        <p:cNvPr id="1" name=""/>
+        <p:cNvGrpSpPr/>
+        <p:nvPr/>
+      </p:nvGrpSpPr>
+      <p:grpSpPr/>
+      <p:sp>
+        <p:nvSpPr>
+          <p:cNvPr id="2" name="Rectangle 1"/>
+          <p:cNvSpPr/>
+          <p:nvPr/>
+        </p:nvSpPr>
+        <p:spPr>
+          <a:xfrm>
+            <a:off x="0" y="0"/>
+            <a:ext cx="201168" cy="6858000"/>
+          </a:xfrm>
+          <a:prstGeom prst="rect">
+            <a:avLst/>
+          </a:prstGeom>
+          <a:solidFill>
+            <a:srgbClr val="2563EB"/>
+          </a:solidFill>
+          <a:ln>
+            <a:noFill/>
+          </a:ln>
+          <a:effectLst/>
+        </p:spPr>
+        <p:style>
+          <a:lnRef idx="1">
+            <a:schemeClr val="accent1"/>
+          </a:lnRef>
+          <a:fillRef idx="3">
+            <a:schemeClr val="accent1"/>
+          </a:fillRef>
+          <a:effectRef idx="2">
+            <a:schemeClr val="accent1"/>
+          </a:effectRef>
+          <a:fontRef idx="minor">
+            <a:schemeClr val="lt1"/>
+          </a:fontRef>
+        </p:style>
+        <p:txBody>
+          <a:bodyPr rtlCol="0" anchor="ctr"/>
+          <a:lstStyle/>
+          <a:p>
+            <a:pPr algn="ctr"/>
+          </a:p>
+        </p:txBody>
+      </p:sp>
+      <p:sp>
+        <p:nvSpPr>
+          <p:cNvPr id="3" name="TextBox 2"/>
+          <p:cNvSpPr txBox="1"/>
+          <p:nvPr/>
+        </p:nvSpPr>
+        <p:spPr>
+          <a:xfrm>
+            <a:off x="822960" y="640080"/>
+            <a:ext cx="10545775" cy="548640"/>
+          </a:xfrm>
+          <a:prstGeom prst="rect">
+            <a:avLst/>
+          </a:prstGeom>
+          <a:noFill/>
+        </p:spPr>
+        <p:txBody>
+          <a:bodyPr wrap="square" anchor="t">
+            <a:spAutoFit/>
+          </a:bodyPr>
+          <a:lstStyle/>
+          <a:p>
+            <a:pPr algn="l">
+              <a:lnSpc>
+                <a:spcPct val="125000"/>
+              </a:lnSpc>
+            </a:pPr>
+            <a:r>
+              <a:rPr sz="2000" b="1">
+                <a:solidFill>
+                  <a:srgbClr val="2563EB"/>
+                </a:solidFill>
+                <a:latin typeface="맑은 고딕"/>
+              </a:rPr>
+              <a:t>학생 입장 화면</a:t>
+            </a:r>
+          </a:p>
+        </p:txBody>
+      </p:sp>
+      <p:pic>
+        <p:nvPicPr>
+          <p:cNvPr id="4" name="Picture 3" descr="L04_0_입장.png"/>
+          <p:cNvPicPr>
+            <a:picLocks noChangeAspect="1"/>
+          </p:cNvPicPr>
+          <p:nvPr/>
+        </p:nvPicPr>
+        <p:blipFill>
+          <a:blip r:embed="rId2"/>
+          <a:stretch>
+            <a:fillRect/>
+          </a:stretch>
+        </p:blipFill>
+        <p:spPr>
+          <a:xfrm>
+            <a:off x="822960" y="1280160"/>
+            <a:ext cx="4293704" cy="4937760"/>
+          </a:xfrm>
+          <a:prstGeom prst="rect">
+            <a:avLst/>
+          </a:prstGeom>
+        </p:spPr>
+      </p:pic>
+      <p:sp>
+        <p:nvSpPr>
+          <p:cNvPr id="5" name="TextBox 4"/>
+          <p:cNvSpPr txBox="1"/>
+          <p:nvPr/>
+        </p:nvSpPr>
+        <p:spPr>
+          <a:xfrm>
+            <a:off x="6949440" y="1463040"/>
+            <a:ext cx="4754880" cy="3291840"/>
+          </a:xfrm>
+          <a:prstGeom prst="rect">
+            <a:avLst/>
+          </a:prstGeom>
+          <a:noFill/>
+        </p:spPr>
+        <p:txBody>
+          <a:bodyPr wrap="square" anchor="t">
+            <a:spAutoFit/>
+          </a:bodyPr>
+          <a:lstStyle/>
+          <a:p>
+            <a:pPr algn="l">
+              <a:lnSpc>
+                <a:spcPct val="160000"/>
+              </a:lnSpc>
+            </a:pPr>
+            <a:r>
+              <a:rPr sz="2000" b="0">
+                <a:solidFill>
+                  <a:srgbClr val="1F2937"/>
+                </a:solidFill>
+                <a:latin typeface="맑은 고딕"/>
+              </a:rPr>
+              <a:t>방 번호 여섯 자리와 닉네임만 넣는다.</a:t>
+            </a:r>
+          </a:p>
+          <a:p>
+            <a:pPr algn="l">
+              <a:lnSpc>
+                <a:spcPct val="160000"/>
+              </a:lnSpc>
+            </a:pPr>
+            <a:r>
+              <a:rPr sz="2000" b="0">
+                <a:solidFill>
+                  <a:srgbClr val="1F2937"/>
+                </a:solidFill>
+                <a:latin typeface="맑은 고딕"/>
+              </a:rPr>
+              <a:t>나만 아는 숫자 네 자리는 사전과 사후 설문을 잇는 데만 쓴다.</a:t>
+            </a:r>
+          </a:p>
+          <a:p>
+            <a:pPr algn="l">
+              <a:lnSpc>
+                <a:spcPct val="160000"/>
+              </a:lnSpc>
+            </a:pPr>
+            <a:r>
+              <a:rPr sz="2000" b="0">
+                <a:solidFill>
+                  <a:srgbClr val="1F2937"/>
+                </a:solidFill>
+                <a:latin typeface="맑은 고딕"/>
+              </a:rPr>
+              <a:t>기기가 없으면 둘러보기로 교사가 시연한다.</a:t>
+            </a:r>
+          </a:p>
+        </p:txBody>
+      </p:sp>
+    </p:spTree>
+  </p:cSld>
+  <p:clrMapOvr>
+    <a:masterClrMapping/>
+  </p:clrMapOvr>
+</p:sld>
+</file>
+
+<file path=ppt/slides/slide13.xml><?xml version="1.0" encoding="utf-8"?>
+<p:sld xmlns:a="http://schemas.openxmlformats.org/drawingml/2006/main" xmlns:p="http://schemas.openxmlformats.org/presentationml/2006/main" xmlns:r="http://schemas.openxmlformats.org/officeDocument/2006/relationships">
+  <p:cSld>
+    <p:spTree>
+      <p:nvGrpSpPr>
+        <p:cNvPr id="1" name=""/>
+        <p:cNvGrpSpPr/>
+        <p:nvPr/>
+      </p:nvGrpSpPr>
+      <p:grpSpPr/>
+      <p:sp>
+        <p:nvSpPr>
+          <p:cNvPr id="2" name="Rectangle 1"/>
+          <p:cNvSpPr/>
+          <p:nvPr/>
+        </p:nvSpPr>
+        <p:spPr>
+          <a:xfrm>
+            <a:off x="0" y="0"/>
+            <a:ext cx="201168" cy="6858000"/>
+          </a:xfrm>
+          <a:prstGeom prst="rect">
+            <a:avLst/>
+          </a:prstGeom>
+          <a:solidFill>
+            <a:srgbClr val="2563EB"/>
+          </a:solidFill>
+          <a:ln>
+            <a:noFill/>
+          </a:ln>
+          <a:effectLst/>
+        </p:spPr>
+        <p:style>
+          <a:lnRef idx="1">
+            <a:schemeClr val="accent1"/>
+          </a:lnRef>
+          <a:fillRef idx="3">
+            <a:schemeClr val="accent1"/>
+          </a:fillRef>
+          <a:effectRef idx="2">
+            <a:schemeClr val="accent1"/>
+          </a:effectRef>
+          <a:fontRef idx="minor">
+            <a:schemeClr val="lt1"/>
+          </a:fontRef>
+        </p:style>
+        <p:txBody>
+          <a:bodyPr rtlCol="0" anchor="ctr"/>
+          <a:lstStyle/>
+          <a:p>
+            <a:pPr algn="ctr"/>
+          </a:p>
+        </p:txBody>
+      </p:sp>
+      <p:sp>
+        <p:nvSpPr>
+          <p:cNvPr id="3" name="TextBox 2"/>
+          <p:cNvSpPr txBox="1"/>
+          <p:nvPr/>
+        </p:nvSpPr>
+        <p:spPr>
+          <a:xfrm>
+            <a:off x="822960" y="640080"/>
+            <a:ext cx="10545775" cy="548640"/>
+          </a:xfrm>
+          <a:prstGeom prst="rect">
+            <a:avLst/>
+          </a:prstGeom>
+          <a:noFill/>
+        </p:spPr>
+        <p:txBody>
+          <a:bodyPr wrap="square" anchor="t">
+            <a:spAutoFit/>
+          </a:bodyPr>
+          <a:lstStyle/>
+          <a:p>
+            <a:pPr algn="l">
+              <a:lnSpc>
+                <a:spcPct val="125000"/>
+              </a:lnSpc>
+            </a:pPr>
+            <a:r>
+              <a:rPr sz="2000" b="1">
+                <a:solidFill>
+                  <a:srgbClr val="2563EB"/>
+                </a:solidFill>
+                <a:latin typeface="맑은 고딕"/>
+              </a:rPr>
+              <a:t>웹앱 1단계 · 허브</a:t>
+            </a:r>
+          </a:p>
+        </p:txBody>
+      </p:sp>
+      <p:pic>
+        <p:nvPicPr>
+          <p:cNvPr id="4" name="Picture 3" descr="L04_2_hub.png"/>
+          <p:cNvPicPr>
+            <a:picLocks noChangeAspect="1"/>
+          </p:cNvPicPr>
+          <p:nvPr/>
+        </p:nvPicPr>
+        <p:blipFill>
+          <a:blip r:embed="rId2"/>
+          <a:stretch>
+            <a:fillRect/>
+          </a:stretch>
+        </p:blipFill>
+        <p:spPr>
+          <a:xfrm>
+            <a:off x="822960" y="1280160"/>
+            <a:ext cx="3526971" cy="4937760"/>
+          </a:xfrm>
+          <a:prstGeom prst="rect">
+            <a:avLst/>
+          </a:prstGeom>
+        </p:spPr>
+      </p:pic>
+      <p:sp>
+        <p:nvSpPr>
+          <p:cNvPr id="5" name="TextBox 4"/>
+          <p:cNvSpPr txBox="1"/>
+          <p:nvPr/>
+        </p:nvSpPr>
+        <p:spPr>
+          <a:xfrm>
+            <a:off x="6949440" y="1645920"/>
+            <a:ext cx="4754880" cy="2926080"/>
+          </a:xfrm>
+          <a:prstGeom prst="rect">
+            <a:avLst/>
+          </a:prstGeom>
+          <a:noFill/>
+        </p:spPr>
+        <p:txBody>
+          <a:bodyPr wrap="square" anchor="t">
+            <a:spAutoFit/>
+          </a:bodyPr>
+          <a:lstStyle/>
+          <a:p>
+            <a:pPr algn="l">
+              <a:lnSpc>
+                <a:spcPct val="160000"/>
+              </a:lnSpc>
+            </a:pPr>
+            <a:r>
+              <a:rPr sz="2200" b="0">
+                <a:solidFill>
+                  <a:srgbClr val="1F2937"/>
+                </a:solidFill>
+                <a:latin typeface="맑은 고딕"/>
+              </a:rPr>
+              <a:t>카드 3칸 분류판</a:t>
+            </a:r>
+          </a:p>
+          <a:p>
+            <a:pPr algn="l">
+              <a:lnSpc>
+                <a:spcPct val="160000"/>
+              </a:lnSpc>
+            </a:pPr>
+            <a:r>
+              <a:rPr sz="2200" b="0">
+                <a:solidFill>
+                  <a:srgbClr val="1F2937"/>
+                </a:solidFill>
+                <a:latin typeface="맑은 고딕"/>
+              </a:rPr>
+              <a:t>학생이 여기서 남긴 것이 활동지와 이어진다.</a:t>
+            </a:r>
+          </a:p>
+        </p:txBody>
+      </p:sp>
+    </p:spTree>
+  </p:cSld>
+  <p:clrMapOvr>
+    <a:masterClrMapping/>
+  </p:clrMapOvr>
+</p:sld>
+</file>
+
+<file path=ppt/slides/slide14.xml><?xml version="1.0" encoding="utf-8"?>
+<p:sld xmlns:a="http://schemas.openxmlformats.org/drawingml/2006/main" xmlns:p="http://schemas.openxmlformats.org/presentationml/2006/main" xmlns:r="http://schemas.openxmlformats.org/officeDocument/2006/relationships">
+  <p:cSld>
+    <p:spTree>
+      <p:nvGrpSpPr>
+        <p:cNvPr id="1" name=""/>
+        <p:cNvGrpSpPr/>
+        <p:nvPr/>
+      </p:nvGrpSpPr>
+      <p:grpSpPr/>
+      <p:sp>
+        <p:nvSpPr>
+          <p:cNvPr id="2" name="Rectangle 1"/>
+          <p:cNvSpPr/>
+          <p:nvPr/>
+        </p:nvSpPr>
+        <p:spPr>
+          <a:xfrm>
+            <a:off x="0" y="0"/>
+            <a:ext cx="201168" cy="6858000"/>
+          </a:xfrm>
+          <a:prstGeom prst="rect">
+            <a:avLst/>
+          </a:prstGeom>
+          <a:solidFill>
+            <a:srgbClr val="2563EB"/>
+          </a:solidFill>
+          <a:ln>
+            <a:noFill/>
+          </a:ln>
+          <a:effectLst/>
+        </p:spPr>
+        <p:style>
+          <a:lnRef idx="1">
+            <a:schemeClr val="accent1"/>
+          </a:lnRef>
+          <a:fillRef idx="3">
+            <a:schemeClr val="accent1"/>
+          </a:fillRef>
+          <a:effectRef idx="2">
+            <a:schemeClr val="accent1"/>
+          </a:effectRef>
+          <a:fontRef idx="minor">
+            <a:schemeClr val="lt1"/>
+          </a:fontRef>
+        </p:style>
+        <p:txBody>
+          <a:bodyPr rtlCol="0" anchor="ctr"/>
+          <a:lstStyle/>
+          <a:p>
+            <a:pPr algn="ctr"/>
+          </a:p>
+        </p:txBody>
+      </p:sp>
+      <p:sp>
+        <p:nvSpPr>
+          <p:cNvPr id="3" name="TextBox 2"/>
+          <p:cNvSpPr txBox="1"/>
+          <p:nvPr/>
+        </p:nvSpPr>
+        <p:spPr>
+          <a:xfrm>
+            <a:off x="822960" y="640080"/>
+            <a:ext cx="10545775" cy="548640"/>
+          </a:xfrm>
+          <a:prstGeom prst="rect">
+            <a:avLst/>
+          </a:prstGeom>
+          <a:noFill/>
+        </p:spPr>
+        <p:txBody>
+          <a:bodyPr wrap="square" anchor="t">
+            <a:spAutoFit/>
+          </a:bodyPr>
+          <a:lstStyle/>
+          <a:p>
+            <a:pPr algn="l">
+              <a:lnSpc>
+                <a:spcPct val="125000"/>
+              </a:lnSpc>
+            </a:pPr>
+            <a:r>
+              <a:rPr sz="2000" b="1">
+                <a:solidFill>
+                  <a:srgbClr val="2563EB"/>
+                </a:solidFill>
+                <a:latin typeface="맑은 고딕"/>
+              </a:rPr>
+              <a:t>웹앱 2단계 · 훈련장</a:t>
+            </a:r>
+          </a:p>
+        </p:txBody>
+      </p:sp>
+      <p:pic>
+        <p:nvPicPr>
+          <p:cNvPr id="4" name="Picture 3" descr="L04_3_train.png"/>
+          <p:cNvPicPr>
+            <a:picLocks noChangeAspect="1"/>
+          </p:cNvPicPr>
+          <p:nvPr/>
+        </p:nvPicPr>
+        <p:blipFill>
+          <a:blip r:embed="rId2"/>
+          <a:stretch>
+            <a:fillRect/>
+          </a:stretch>
+        </p:blipFill>
+        <p:spPr>
+          <a:xfrm>
+            <a:off x="822960" y="1280160"/>
+            <a:ext cx="3526971" cy="4937760"/>
+          </a:xfrm>
+          <a:prstGeom prst="rect">
+            <a:avLst/>
+          </a:prstGeom>
+        </p:spPr>
+      </p:pic>
+      <p:sp>
+        <p:nvSpPr>
+          <p:cNvPr id="5" name="TextBox 4"/>
+          <p:cNvSpPr txBox="1"/>
+          <p:nvPr/>
+        </p:nvSpPr>
+        <p:spPr>
+          <a:xfrm>
+            <a:off x="6949440" y="1645920"/>
+            <a:ext cx="4754880" cy="2926080"/>
+          </a:xfrm>
+          <a:prstGeom prst="rect">
+            <a:avLst/>
+          </a:prstGeom>
+          <a:noFill/>
+        </p:spPr>
+        <p:txBody>
+          <a:bodyPr wrap="square" anchor="t">
+            <a:spAutoFit/>
+          </a:bodyPr>
+          <a:lstStyle/>
+          <a:p>
+            <a:pPr algn="l">
+              <a:lnSpc>
+                <a:spcPct val="160000"/>
+              </a:lnSpc>
+            </a:pPr>
+            <a:r>
+              <a:rPr sz="2200" b="0">
+                <a:solidFill>
+                  <a:srgbClr val="1F2937"/>
+                </a:solidFill>
+                <a:latin typeface="맑은 고딕"/>
+              </a:rPr>
+              <a:t>근거 쓰기</a:t>
+            </a:r>
+          </a:p>
+          <a:p>
+            <a:pPr algn="l">
+              <a:lnSpc>
+                <a:spcPct val="160000"/>
+              </a:lnSpc>
+            </a:pPr>
+            <a:r>
+              <a:rPr sz="2200" b="0">
+                <a:solidFill>
+                  <a:srgbClr val="1F2937"/>
+                </a:solidFill>
+                <a:latin typeface="맑은 고딕"/>
+              </a:rPr>
+              <a:t>학생이 여기서 남긴 것이 활동지와 이어진다.</a:t>
+            </a:r>
+          </a:p>
+        </p:txBody>
+      </p:sp>
+    </p:spTree>
+  </p:cSld>
+  <p:clrMapOvr>
+    <a:masterClrMapping/>
+  </p:clrMapOvr>
+</p:sld>
+</file>
+
+<file path=ppt/slides/slide15.xml><?xml version="1.0" encoding="utf-8"?>
+<p:sld xmlns:a="http://schemas.openxmlformats.org/drawingml/2006/main" xmlns:p="http://schemas.openxmlformats.org/presentationml/2006/main" xmlns:r="http://schemas.openxmlformats.org/officeDocument/2006/relationships">
+  <p:cSld>
+    <p:spTree>
+      <p:nvGrpSpPr>
+        <p:cNvPr id="1" name=""/>
+        <p:cNvGrpSpPr/>
+        <p:nvPr/>
+      </p:nvGrpSpPr>
+      <p:grpSpPr/>
+      <p:sp>
+        <p:nvSpPr>
+          <p:cNvPr id="2" name="Rectangle 1"/>
+          <p:cNvSpPr/>
+          <p:nvPr/>
+        </p:nvSpPr>
+        <p:spPr>
+          <a:xfrm>
+            <a:off x="0" y="0"/>
+            <a:ext cx="201168" cy="6858000"/>
+          </a:xfrm>
+          <a:prstGeom prst="rect">
+            <a:avLst/>
+          </a:prstGeom>
+          <a:solidFill>
+            <a:srgbClr val="2563EB"/>
+          </a:solidFill>
+          <a:ln>
+            <a:noFill/>
+          </a:ln>
+          <a:effectLst/>
+        </p:spPr>
+        <p:style>
+          <a:lnRef idx="1">
+            <a:schemeClr val="accent1"/>
+          </a:lnRef>
+          <a:fillRef idx="3">
+            <a:schemeClr val="accent1"/>
+          </a:fillRef>
+          <a:effectRef idx="2">
+            <a:schemeClr val="accent1"/>
+          </a:effectRef>
+          <a:fontRef idx="minor">
+            <a:schemeClr val="lt1"/>
+          </a:fontRef>
+        </p:style>
+        <p:txBody>
+          <a:bodyPr rtlCol="0" anchor="ctr"/>
+          <a:lstStyle/>
+          <a:p>
+            <a:pPr algn="ctr"/>
+          </a:p>
+        </p:txBody>
+      </p:sp>
+      <p:sp>
+        <p:nvSpPr>
+          <p:cNvPr id="3" name="TextBox 2"/>
+          <p:cNvSpPr txBox="1"/>
+          <p:nvPr/>
+        </p:nvSpPr>
+        <p:spPr>
+          <a:xfrm>
+            <a:off x="822960" y="640080"/>
+            <a:ext cx="10545775" cy="548640"/>
+          </a:xfrm>
+          <a:prstGeom prst="rect">
+            <a:avLst/>
+          </a:prstGeom>
+          <a:noFill/>
+        </p:spPr>
+        <p:txBody>
+          <a:bodyPr wrap="square" anchor="t">
+            <a:spAutoFit/>
+          </a:bodyPr>
+          <a:lstStyle/>
+          <a:p>
+            <a:pPr algn="l">
+              <a:lnSpc>
+                <a:spcPct val="125000"/>
+              </a:lnSpc>
+            </a:pPr>
+            <a:r>
+              <a:rPr sz="2000" b="1">
+                <a:solidFill>
+                  <a:srgbClr val="2563EB"/>
+                </a:solidFill>
+                <a:latin typeface="맑은 고딕"/>
+              </a:rPr>
+              <a:t>웹앱 3단계 · 분류실</a:t>
+            </a:r>
+          </a:p>
+        </p:txBody>
+      </p:sp>
+      <p:pic>
+        <p:nvPicPr>
+          <p:cNvPr id="4" name="Picture 3" descr="L04_4_sort.png"/>
+          <p:cNvPicPr>
+            <a:picLocks noChangeAspect="1"/>
+          </p:cNvPicPr>
+          <p:nvPr/>
+        </p:nvPicPr>
+        <p:blipFill>
+          <a:blip r:embed="rId2"/>
+          <a:stretch>
+            <a:fillRect/>
+          </a:stretch>
+        </p:blipFill>
+        <p:spPr>
+          <a:xfrm>
+            <a:off x="822960" y="1280160"/>
+            <a:ext cx="3526971" cy="4937760"/>
+          </a:xfrm>
+          <a:prstGeom prst="rect">
+            <a:avLst/>
+          </a:prstGeom>
+        </p:spPr>
+      </p:pic>
+      <p:sp>
+        <p:nvSpPr>
+          <p:cNvPr id="5" name="TextBox 4"/>
+          <p:cNvSpPr txBox="1"/>
+          <p:nvPr/>
+        </p:nvSpPr>
+        <p:spPr>
+          <a:xfrm>
+            <a:off x="6949440" y="1645920"/>
+            <a:ext cx="4754880" cy="2926080"/>
+          </a:xfrm>
+          <a:prstGeom prst="rect">
+            <a:avLst/>
+          </a:prstGeom>
+          <a:noFill/>
+        </p:spPr>
+        <p:txBody>
+          <a:bodyPr wrap="square" anchor="t">
+            <a:spAutoFit/>
+          </a:bodyPr>
+          <a:lstStyle/>
+          <a:p>
+            <a:pPr algn="l">
+              <a:lnSpc>
+                <a:spcPct val="160000"/>
+              </a:lnSpc>
+            </a:pPr>
+            <a:r>
+              <a:rPr sz="2200" b="0">
+                <a:solidFill>
+                  <a:srgbClr val="1F2937"/>
+                </a:solidFill>
+                <a:latin typeface="맑은 고딕"/>
+              </a:rPr>
+              <a:t>학급 집계 비교</a:t>
+            </a:r>
+          </a:p>
+          <a:p>
+            <a:pPr algn="l">
+              <a:lnSpc>
+                <a:spcPct val="160000"/>
+              </a:lnSpc>
+            </a:pPr>
+            <a:r>
+              <a:rPr sz="2200" b="0">
+                <a:solidFill>
+                  <a:srgbClr val="1F2937"/>
+                </a:solidFill>
+                <a:latin typeface="맑은 고딕"/>
+              </a:rPr>
+              <a:t>학생이 여기서 남긴 것이 활동지와 이어진다.</a:t>
+            </a:r>
+          </a:p>
+        </p:txBody>
+      </p:sp>
+    </p:spTree>
+  </p:cSld>
+  <p:clrMapOvr>
+    <a:masterClrMapping/>
+  </p:clrMapOvr>
+</p:sld>
+</file>
+
+<file path=ppt/slides/slide16.xml><?xml version="1.0" encoding="utf-8"?>
+<p:sld xmlns:a="http://schemas.openxmlformats.org/drawingml/2006/main" xmlns:p="http://schemas.openxmlformats.org/presentationml/2006/main" xmlns:r="http://schemas.openxmlformats.org/officeDocument/2006/relationships">
+  <p:cSld>
+    <p:spTree>
+      <p:nvGrpSpPr>
+        <p:cNvPr id="1" name=""/>
+        <p:cNvGrpSpPr/>
+        <p:nvPr/>
+      </p:nvGrpSpPr>
+      <p:grpSpPr/>
+      <p:sp>
+        <p:nvSpPr>
+          <p:cNvPr id="2" name="Rectangle 1"/>
+          <p:cNvSpPr/>
+          <p:nvPr/>
+        </p:nvSpPr>
+        <p:spPr>
+          <a:xfrm>
+            <a:off x="0" y="0"/>
+            <a:ext cx="201168" cy="6858000"/>
+          </a:xfrm>
+          <a:prstGeom prst="rect">
+            <a:avLst/>
+          </a:prstGeom>
+          <a:solidFill>
+            <a:srgbClr val="2563EB"/>
+          </a:solidFill>
+          <a:ln>
+            <a:noFill/>
+          </a:ln>
+          <a:effectLst/>
+        </p:spPr>
+        <p:style>
+          <a:lnRef idx="1">
+            <a:schemeClr val="accent1"/>
+          </a:lnRef>
+          <a:fillRef idx="3">
+            <a:schemeClr val="accent1"/>
+          </a:fillRef>
+          <a:effectRef idx="2">
+            <a:schemeClr val="accent1"/>
+          </a:effectRef>
+          <a:fontRef idx="minor">
+            <a:schemeClr val="lt1"/>
+          </a:fontRef>
+        </p:style>
+        <p:txBody>
+          <a:bodyPr rtlCol="0" anchor="ctr"/>
+          <a:lstStyle/>
+          <a:p>
+            <a:pPr algn="ctr"/>
+          </a:p>
+        </p:txBody>
+      </p:sp>
+      <p:sp>
+        <p:nvSpPr>
+          <p:cNvPr id="3" name="TextBox 2"/>
+          <p:cNvSpPr txBox="1"/>
+          <p:nvPr/>
+        </p:nvSpPr>
+        <p:spPr>
+          <a:xfrm>
+            <a:off x="822960" y="640080"/>
+            <a:ext cx="10545775" cy="548640"/>
+          </a:xfrm>
+          <a:prstGeom prst="rect">
+            <a:avLst/>
+          </a:prstGeom>
+          <a:noFill/>
+        </p:spPr>
+        <p:txBody>
+          <a:bodyPr wrap="square" anchor="t">
+            <a:spAutoFit/>
+          </a:bodyPr>
+          <a:lstStyle/>
+          <a:p>
+            <a:pPr algn="l">
+              <a:lnSpc>
+                <a:spcPct val="125000"/>
+              </a:lnSpc>
+            </a:pPr>
+            <a:r>
+              <a:rPr sz="2000" b="1">
+                <a:solidFill>
+                  <a:srgbClr val="2563EB"/>
+                </a:solidFill>
+                <a:latin typeface="맑은 고딕"/>
+              </a:rPr>
+              <a:t>웹앱 4단계 · 열람실</a:t>
+            </a:r>
+          </a:p>
+        </p:txBody>
+      </p:sp>
+      <p:pic>
+        <p:nvPicPr>
+          <p:cNvPr id="4" name="Picture 3" descr="L04_5_open.png"/>
+          <p:cNvPicPr>
+            <a:picLocks noChangeAspect="1"/>
+          </p:cNvPicPr>
+          <p:nvPr/>
+        </p:nvPicPr>
+        <p:blipFill>
+          <a:blip r:embed="rId2"/>
+          <a:stretch>
+            <a:fillRect/>
+          </a:stretch>
+        </p:blipFill>
+        <p:spPr>
+          <a:xfrm>
+            <a:off x="822960" y="1280160"/>
+            <a:ext cx="3526971" cy="4937760"/>
+          </a:xfrm>
+          <a:prstGeom prst="rect">
+            <a:avLst/>
+          </a:prstGeom>
+        </p:spPr>
+      </p:pic>
+      <p:sp>
+        <p:nvSpPr>
+          <p:cNvPr id="5" name="TextBox 4"/>
+          <p:cNvSpPr txBox="1"/>
+          <p:nvPr/>
+        </p:nvSpPr>
+        <p:spPr>
+          <a:xfrm>
+            <a:off x="6949440" y="1645920"/>
+            <a:ext cx="4754880" cy="2926080"/>
+          </a:xfrm>
+          <a:prstGeom prst="rect">
+            <a:avLst/>
+          </a:prstGeom>
+          <a:noFill/>
+        </p:spPr>
+        <p:txBody>
+          <a:bodyPr wrap="square" anchor="t">
+            <a:spAutoFit/>
+          </a:bodyPr>
+          <a:lstStyle/>
+          <a:p>
+            <a:pPr algn="l">
+              <a:lnSpc>
+                <a:spcPct val="160000"/>
+              </a:lnSpc>
+            </a:pPr>
+            <a:r>
+              <a:rPr sz="2200" b="0">
+                <a:solidFill>
+                  <a:srgbClr val="1F2937"/>
+                </a:solidFill>
+                <a:latin typeface="맑은 고딕"/>
+              </a:rPr>
+              <a:t>개인정보 지킴이 수칙 만들기</a:t>
+            </a:r>
+          </a:p>
+          <a:p>
+            <a:pPr algn="l">
+              <a:lnSpc>
+                <a:spcPct val="160000"/>
+              </a:lnSpc>
+            </a:pPr>
+            <a:r>
+              <a:rPr sz="2200" b="0">
+                <a:solidFill>
+                  <a:srgbClr val="1F2937"/>
+                </a:solidFill>
+                <a:latin typeface="맑은 고딕"/>
+              </a:rPr>
+              <a:t>학생이 여기서 남긴 것이 활동지와 이어진다.</a:t>
+            </a:r>
+          </a:p>
+        </p:txBody>
+      </p:sp>
+    </p:spTree>
+  </p:cSld>
+  <p:clrMapOvr>
+    <a:masterClrMapping/>
+  </p:clrMapOvr>
+</p:sld>
+</file>
+
+<file path=ppt/slides/slide17.xml><?xml version="1.0" encoding="utf-8"?>
+<p:sld xmlns:a="http://schemas.openxmlformats.org/drawingml/2006/main" xmlns:p="http://schemas.openxmlformats.org/presentationml/2006/main" xmlns:r="http://schemas.openxmlformats.org/officeDocument/2006/relationships">
+  <p:cSld>
+    <p:spTree>
+      <p:nvGrpSpPr>
+        <p:cNvPr id="1" name=""/>
+        <p:cNvGrpSpPr/>
+        <p:nvPr/>
+      </p:nvGrpSpPr>
+      <p:grpSpPr/>
+      <p:sp>
+        <p:nvSpPr>
+          <p:cNvPr id="2" name="Rectangle 1"/>
+          <p:cNvSpPr/>
+          <p:nvPr/>
+        </p:nvSpPr>
+        <p:spPr>
+          <a:xfrm>
+            <a:off x="0" y="0"/>
+            <a:ext cx="201168" cy="6858000"/>
+          </a:xfrm>
+          <a:prstGeom prst="rect">
+            <a:avLst/>
+          </a:prstGeom>
+          <a:solidFill>
+            <a:srgbClr val="2563EB"/>
+          </a:solidFill>
+          <a:ln>
+            <a:noFill/>
+          </a:ln>
+          <a:effectLst/>
+        </p:spPr>
+        <p:style>
+          <a:lnRef idx="1">
+            <a:schemeClr val="accent1"/>
+          </a:lnRef>
+          <a:fillRef idx="3">
+            <a:schemeClr val="accent1"/>
+          </a:fillRef>
+          <a:effectRef idx="2">
+            <a:schemeClr val="accent1"/>
+          </a:effectRef>
+          <a:fontRef idx="minor">
+            <a:schemeClr val="lt1"/>
+          </a:fontRef>
+        </p:style>
+        <p:txBody>
+          <a:bodyPr rtlCol="0" anchor="ctr"/>
+          <a:lstStyle/>
+          <a:p>
+            <a:pPr algn="ctr"/>
+          </a:p>
+        </p:txBody>
+      </p:sp>
+      <p:sp>
+        <p:nvSpPr>
+          <p:cNvPr id="3" name="TextBox 2"/>
+          <p:cNvSpPr txBox="1"/>
+          <p:nvPr/>
+        </p:nvSpPr>
+        <p:spPr>
+          <a:xfrm>
+            <a:off x="822960" y="640080"/>
+            <a:ext cx="10545775" cy="548640"/>
+          </a:xfrm>
+          <a:prstGeom prst="rect">
+            <a:avLst/>
+          </a:prstGeom>
+          <a:noFill/>
+        </p:spPr>
+        <p:txBody>
+          <a:bodyPr wrap="square" anchor="t">
+            <a:spAutoFit/>
+          </a:bodyPr>
+          <a:lstStyle/>
+          <a:p>
+            <a:pPr algn="l">
+              <a:lnSpc>
+                <a:spcPct val="125000"/>
+              </a:lnSpc>
+            </a:pPr>
+            <a:r>
+              <a:rPr sz="2000" b="1">
+                <a:solidFill>
+                  <a:srgbClr val="2563EB"/>
+                </a:solidFill>
+                <a:latin typeface="맑은 고딕"/>
+              </a:rPr>
+              <a:t>웹앱 5단계 · 조건 작성소</a:t>
+            </a:r>
+          </a:p>
+        </p:txBody>
+      </p:sp>
+      <p:pic>
+        <p:nvPicPr>
+          <p:cNvPr id="4" name="Picture 3" descr="L04_6_cond.png"/>
+          <p:cNvPicPr>
+            <a:picLocks noChangeAspect="1"/>
+          </p:cNvPicPr>
+          <p:nvPr/>
+        </p:nvPicPr>
+        <p:blipFill>
+          <a:blip r:embed="rId2"/>
+          <a:stretch>
+            <a:fillRect/>
+          </a:stretch>
+        </p:blipFill>
+        <p:spPr>
+          <a:xfrm>
+            <a:off x="822960" y="1280160"/>
+            <a:ext cx="3526971" cy="4937760"/>
+          </a:xfrm>
+          <a:prstGeom prst="rect">
+            <a:avLst/>
+          </a:prstGeom>
+        </p:spPr>
+      </p:pic>
+      <p:sp>
+        <p:nvSpPr>
+          <p:cNvPr id="5" name="TextBox 4"/>
+          <p:cNvSpPr txBox="1"/>
+          <p:nvPr/>
+        </p:nvSpPr>
+        <p:spPr>
+          <a:xfrm>
+            <a:off x="6949440" y="1645920"/>
+            <a:ext cx="4754880" cy="2926080"/>
+          </a:xfrm>
+          <a:prstGeom prst="rect">
+            <a:avLst/>
+          </a:prstGeom>
+          <a:noFill/>
+        </p:spPr>
+        <p:txBody>
+          <a:bodyPr wrap="square" anchor="t">
+            <a:spAutoFit/>
+          </a:bodyPr>
+          <a:lstStyle/>
+          <a:p>
+            <a:pPr algn="l">
+              <a:lnSpc>
+                <a:spcPct val="160000"/>
+              </a:lnSpc>
+            </a:pPr>
+            <a:r>
+              <a:rPr sz="2200" b="0">
+                <a:solidFill>
+                  <a:srgbClr val="1F2937"/>
+                </a:solidFill>
+                <a:latin typeface="맑은 고딕"/>
+              </a:rPr>
+              <a:t>조건 작성소</a:t>
+            </a:r>
+          </a:p>
+          <a:p>
+            <a:pPr algn="l">
+              <a:lnSpc>
+                <a:spcPct val="160000"/>
+              </a:lnSpc>
+            </a:pPr>
+            <a:r>
+              <a:rPr sz="2200" b="0">
+                <a:solidFill>
+                  <a:srgbClr val="1F2937"/>
+                </a:solidFill>
+                <a:latin typeface="맑은 고딕"/>
+              </a:rPr>
+              <a:t>학생이 여기서 남긴 것이 활동지와 이어진다.</a:t>
+            </a:r>
+          </a:p>
+        </p:txBody>
+      </p:sp>
+    </p:spTree>
+  </p:cSld>
+  <p:clrMapOvr>
+    <a:masterClrMapping/>
+  </p:clrMapOvr>
+</p:sld>
+</file>
+
+<file path=ppt/slides/slide18.xml><?xml version="1.0" encoding="utf-8"?>
+<p:sld xmlns:a="http://schemas.openxmlformats.org/drawingml/2006/main" xmlns:p="http://schemas.openxmlformats.org/presentationml/2006/main" xmlns:r="http://schemas.openxmlformats.org/officeDocument/2006/relationships">
+  <p:cSld>
+    <p:spTree>
+      <p:nvGrpSpPr>
+        <p:cNvPr id="1" name=""/>
+        <p:cNvGrpSpPr/>
+        <p:nvPr/>
+      </p:nvGrpSpPr>
+      <p:grpSpPr/>
+      <p:sp>
+        <p:nvSpPr>
+          <p:cNvPr id="2" name="Rectangle 1"/>
+          <p:cNvSpPr/>
+          <p:nvPr/>
+        </p:nvSpPr>
+        <p:spPr>
+          <a:xfrm>
+            <a:off x="0" y="0"/>
+            <a:ext cx="201168" cy="6858000"/>
+          </a:xfrm>
+          <a:prstGeom prst="rect">
+            <a:avLst/>
+          </a:prstGeom>
+          <a:solidFill>
+            <a:srgbClr val="2563EB"/>
+          </a:solidFill>
+          <a:ln>
+            <a:noFill/>
+          </a:ln>
+          <a:effectLst/>
+        </p:spPr>
+        <p:style>
+          <a:lnRef idx="1">
+            <a:schemeClr val="accent1"/>
+          </a:lnRef>
+          <a:fillRef idx="3">
+            <a:schemeClr val="accent1"/>
+          </a:fillRef>
+          <a:effectRef idx="2">
+            <a:schemeClr val="accent1"/>
+          </a:effectRef>
+          <a:fontRef idx="minor">
+            <a:schemeClr val="lt1"/>
+          </a:fontRef>
+        </p:style>
+        <p:txBody>
+          <a:bodyPr rtlCol="0" anchor="ctr"/>
+          <a:lstStyle/>
+          <a:p>
+            <a:pPr algn="ctr"/>
+          </a:p>
+        </p:txBody>
+      </p:sp>
+      <p:sp>
+        <p:nvSpPr>
+          <p:cNvPr id="3" name="TextBox 2"/>
+          <p:cNvSpPr txBox="1"/>
+          <p:nvPr/>
+        </p:nvSpPr>
+        <p:spPr>
+          <a:xfrm>
+            <a:off x="822960" y="640080"/>
+            <a:ext cx="10545775" cy="548640"/>
+          </a:xfrm>
+          <a:prstGeom prst="rect">
+            <a:avLst/>
+          </a:prstGeom>
+          <a:noFill/>
+        </p:spPr>
+        <p:txBody>
+          <a:bodyPr wrap="square" anchor="t">
+            <a:spAutoFit/>
+          </a:bodyPr>
+          <a:lstStyle/>
+          <a:p>
+            <a:pPr algn="l">
+              <a:lnSpc>
+                <a:spcPct val="125000"/>
+              </a:lnSpc>
+            </a:pPr>
+            <a:r>
+              <a:rPr sz="2000" b="1">
+                <a:solidFill>
+                  <a:srgbClr val="2563EB"/>
+                </a:solidFill>
+                <a:latin typeface="맑은 고딕"/>
+              </a:rPr>
+              <a:t>웹앱 6단계 · 우리 반과 견주기</a:t>
+            </a:r>
+          </a:p>
+        </p:txBody>
+      </p:sp>
+      <p:pic>
+        <p:nvPicPr>
+          <p:cNvPr id="4" name="Picture 3" descr="L04_7_class.png"/>
+          <p:cNvPicPr>
+            <a:picLocks noChangeAspect="1"/>
+          </p:cNvPicPr>
+          <p:nvPr/>
+        </p:nvPicPr>
+        <p:blipFill>
+          <a:blip r:embed="rId2"/>
+          <a:stretch>
+            <a:fillRect/>
+          </a:stretch>
+        </p:blipFill>
+        <p:spPr>
+          <a:xfrm>
+            <a:off x="822960" y="1280160"/>
+            <a:ext cx="3526971" cy="4937760"/>
+          </a:xfrm>
+          <a:prstGeom prst="rect">
+            <a:avLst/>
+          </a:prstGeom>
+        </p:spPr>
+      </p:pic>
+      <p:sp>
+        <p:nvSpPr>
+          <p:cNvPr id="5" name="TextBox 4"/>
+          <p:cNvSpPr txBox="1"/>
+          <p:nvPr/>
+        </p:nvSpPr>
+        <p:spPr>
+          <a:xfrm>
+            <a:off x="6949440" y="1645920"/>
+            <a:ext cx="4754880" cy="2926080"/>
+          </a:xfrm>
+          <a:prstGeom prst="rect">
+            <a:avLst/>
+          </a:prstGeom>
+          <a:noFill/>
+        </p:spPr>
+        <p:txBody>
+          <a:bodyPr wrap="square" anchor="t">
+            <a:spAutoFit/>
+          </a:bodyPr>
+          <a:lstStyle/>
+          <a:p>
+            <a:pPr algn="l">
+              <a:lnSpc>
+                <a:spcPct val="160000"/>
+              </a:lnSpc>
+            </a:pPr>
+            <a:r>
+              <a:rPr sz="2200" b="0">
+                <a:solidFill>
+                  <a:srgbClr val="1F2937"/>
+                </a:solidFill>
+                <a:latin typeface="맑은 고딕"/>
+              </a:rPr>
+              <a:t>우리 반과 견주기</a:t>
+            </a:r>
+          </a:p>
+          <a:p>
+            <a:pPr algn="l">
+              <a:lnSpc>
+                <a:spcPct val="160000"/>
+              </a:lnSpc>
+            </a:pPr>
+            <a:r>
+              <a:rPr sz="2200" b="0">
+                <a:solidFill>
+                  <a:srgbClr val="1F2937"/>
+                </a:solidFill>
+                <a:latin typeface="맑은 고딕"/>
+              </a:rPr>
+              <a:t>학생이 여기서 남긴 것이 활동지와 이어진다.</a:t>
+            </a:r>
+          </a:p>
+        </p:txBody>
+      </p:sp>
+    </p:spTree>
+  </p:cSld>
+  <p:clrMapOvr>
+    <a:masterClrMapping/>
+  </p:clrMapOvr>
+</p:sld>
+</file>
+
+<file path=ppt/slides/slide19.xml><?xml version="1.0" encoding="utf-8"?>
+<p:sld xmlns:a="http://schemas.openxmlformats.org/drawingml/2006/main" xmlns:p="http://schemas.openxmlformats.org/presentationml/2006/main" xmlns:r="http://schemas.openxmlformats.org/officeDocument/2006/relationships">
+  <p:cSld>
+    <p:spTree>
+      <p:nvGrpSpPr>
+        <p:cNvPr id="1" name=""/>
+        <p:cNvGrpSpPr/>
+        <p:nvPr/>
+      </p:nvGrpSpPr>
+      <p:grpSpPr/>
+      <p:sp>
+        <p:nvSpPr>
+          <p:cNvPr id="2" name="Rectangle 1"/>
+          <p:cNvSpPr/>
+          <p:nvPr/>
+        </p:nvSpPr>
+        <p:spPr>
+          <a:xfrm>
+            <a:off x="0" y="0"/>
+            <a:ext cx="201168" cy="6858000"/>
+          </a:xfrm>
+          <a:prstGeom prst="rect">
+            <a:avLst/>
+          </a:prstGeom>
+          <a:solidFill>
+            <a:srgbClr val="2563EB"/>
+          </a:solidFill>
+          <a:ln>
+            <a:noFill/>
+          </a:ln>
+          <a:effectLst/>
+        </p:spPr>
+        <p:style>
+          <a:lnRef idx="1">
+            <a:schemeClr val="accent1"/>
+          </a:lnRef>
+          <a:fillRef idx="3">
+            <a:schemeClr val="accent1"/>
+          </a:fillRef>
+          <a:effectRef idx="2">
+            <a:schemeClr val="accent1"/>
+          </a:effectRef>
+          <a:fontRef idx="minor">
+            <a:schemeClr val="lt1"/>
+          </a:fontRef>
+        </p:style>
+        <p:txBody>
+          <a:bodyPr rtlCol="0" anchor="ctr"/>
+          <a:lstStyle/>
+          <a:p>
+            <a:pPr algn="ctr"/>
+          </a:p>
+        </p:txBody>
+      </p:sp>
+      <p:sp>
+        <p:nvSpPr>
+          <p:cNvPr id="3" name="TextBox 2"/>
+          <p:cNvSpPr txBox="1"/>
+          <p:nvPr/>
+        </p:nvSpPr>
+        <p:spPr>
+          <a:xfrm>
+            <a:off x="822960" y="914400"/>
+            <a:ext cx="10545775" cy="548640"/>
+          </a:xfrm>
+          <a:prstGeom prst="rect">
+            <a:avLst/>
+          </a:prstGeom>
+          <a:noFill/>
+        </p:spPr>
+        <p:txBody>
+          <a:bodyPr wrap="square" anchor="t">
+            <a:spAutoFit/>
+          </a:bodyPr>
+          <a:lstStyle/>
+          <a:p>
+            <a:pPr algn="l">
+              <a:lnSpc>
+                <a:spcPct val="125000"/>
+              </a:lnSpc>
+            </a:pPr>
+            <a:r>
+              <a:rPr sz="2000" b="1">
+                <a:solidFill>
+                  <a:srgbClr val="2563EB"/>
+                </a:solidFill>
+                <a:latin typeface="맑은 고딕"/>
+              </a:rPr>
+              <a:t>교사 화면</a:t>
             </a:r>
           </a:p>
         </p:txBody>
@@ -4944,7 +7145,7 @@
                 </a:solidFill>
                 <a:latin typeface="맑은 고딕"/>
               </a:rPr>
-              <a:t>· 개인정보와 민감정보는 한 번 입력하면 되돌리기 어렵고, AI 서비스에는 사용 가능 연령과 학교의 기준이 있다.</a:t>
+              <a:t>카드별 학급 분류 분포와 의견이 갈린 카드 확인</a:t>
             </a:r>
           </a:p>
           <a:p>
@@ -4960,46 +7161,23 @@
                 </a:solidFill>
                 <a:latin typeface="맑은 고딕"/>
               </a:rPr>
-              <a:t>· AI 활용 여부와 방식을 스스로 선택할 수 있는 권리가 나에게 있다.</a:t>
-            </a:r>
-          </a:p>
-        </p:txBody>
-      </p:sp>
-      <p:sp>
-        <p:nvSpPr>
-          <p:cNvPr id="5" name="TextBox 4"/>
-          <p:cNvSpPr txBox="1"/>
-          <p:nvPr/>
-        </p:nvSpPr>
-        <p:spPr>
-          <a:xfrm>
-            <a:off x="822960" y="5943600"/>
-            <a:ext cx="10545775" cy="457200"/>
-          </a:xfrm>
-          <a:prstGeom prst="rect">
-            <a:avLst/>
-          </a:prstGeom>
-          <a:noFill/>
-        </p:spPr>
-        <p:txBody>
-          <a:bodyPr wrap="square" anchor="t">
-            <a:spAutoFit/>
-          </a:bodyPr>
-          <a:lstStyle/>
+              <a:t>결과 크게 띄우기를 누르면 학급 화면으로 함께 본다.</a:t>
+            </a:r>
+          </a:p>
           <a:p>
             <a:pPr algn="l">
               <a:lnSpc>
-                <a:spcPct val="125000"/>
+                <a:spcPct val="160000"/>
               </a:lnSpc>
             </a:pPr>
             <a:r>
-              <a:rPr sz="1200" b="0">
+              <a:rPr sz="2400" b="0">
                 <a:solidFill>
-                  <a:srgbClr val="6B7280"/>
+                  <a:srgbClr val="1F2937"/>
                 </a:solidFill>
                 <a:latin typeface="맑은 고딕"/>
               </a:rPr>
-              <a:t>2026년 티처스랩 5기 교사연구회 A.N.D · CC BY-NC-SA</a:t>
+              <a:t>CSV 로 내려받고, 수업이 끝나면 방을 잠근다.</a:t>
             </a:r>
           </a:p>
         </p:txBody>
@@ -5152,6 +7330,201 @@
 </p:sld>
 </file>
 
+<file path=ppt/slides/slide20.xml><?xml version="1.0" encoding="utf-8"?>
+<p:sld xmlns:a="http://schemas.openxmlformats.org/drawingml/2006/main" xmlns:p="http://schemas.openxmlformats.org/presentationml/2006/main" xmlns:r="http://schemas.openxmlformats.org/officeDocument/2006/relationships">
+  <p:cSld>
+    <p:spTree>
+      <p:nvGrpSpPr>
+        <p:cNvPr id="1" name=""/>
+        <p:cNvGrpSpPr/>
+        <p:nvPr/>
+      </p:nvGrpSpPr>
+      <p:grpSpPr/>
+      <p:sp>
+        <p:nvSpPr>
+          <p:cNvPr id="2" name="Rectangle 1"/>
+          <p:cNvSpPr/>
+          <p:nvPr/>
+        </p:nvSpPr>
+        <p:spPr>
+          <a:xfrm>
+            <a:off x="0" y="0"/>
+            <a:ext cx="201168" cy="6858000"/>
+          </a:xfrm>
+          <a:prstGeom prst="rect">
+            <a:avLst/>
+          </a:prstGeom>
+          <a:solidFill>
+            <a:srgbClr val="2563EB"/>
+          </a:solidFill>
+          <a:ln>
+            <a:noFill/>
+          </a:ln>
+          <a:effectLst/>
+        </p:spPr>
+        <p:style>
+          <a:lnRef idx="1">
+            <a:schemeClr val="accent1"/>
+          </a:lnRef>
+          <a:fillRef idx="3">
+            <a:schemeClr val="accent1"/>
+          </a:fillRef>
+          <a:effectRef idx="2">
+            <a:schemeClr val="accent1"/>
+          </a:effectRef>
+          <a:fontRef idx="minor">
+            <a:schemeClr val="lt1"/>
+          </a:fontRef>
+        </p:style>
+        <p:txBody>
+          <a:bodyPr rtlCol="0" anchor="ctr"/>
+          <a:lstStyle/>
+          <a:p>
+            <a:pPr algn="ctr"/>
+          </a:p>
+        </p:txBody>
+      </p:sp>
+      <p:sp>
+        <p:nvSpPr>
+          <p:cNvPr id="3" name="TextBox 2"/>
+          <p:cNvSpPr txBox="1"/>
+          <p:nvPr/>
+        </p:nvSpPr>
+        <p:spPr>
+          <a:xfrm>
+            <a:off x="822960" y="914400"/>
+            <a:ext cx="10545775" cy="548640"/>
+          </a:xfrm>
+          <a:prstGeom prst="rect">
+            <a:avLst/>
+          </a:prstGeom>
+          <a:noFill/>
+        </p:spPr>
+        <p:txBody>
+          <a:bodyPr wrap="square" anchor="t">
+            <a:spAutoFit/>
+          </a:bodyPr>
+          <a:lstStyle/>
+          <a:p>
+            <a:pPr algn="l">
+              <a:lnSpc>
+                <a:spcPct val="125000"/>
+              </a:lnSpc>
+            </a:pPr>
+            <a:r>
+              <a:rPr sz="2000" b="1">
+                <a:solidFill>
+                  <a:srgbClr val="2563EB"/>
+                </a:solidFill>
+                <a:latin typeface="맑은 고딕"/>
+              </a:rPr>
+              <a:t>오늘의 배움</a:t>
+            </a:r>
+          </a:p>
+        </p:txBody>
+      </p:sp>
+      <p:sp>
+        <p:nvSpPr>
+          <p:cNvPr id="4" name="TextBox 3"/>
+          <p:cNvSpPr txBox="1"/>
+          <p:nvPr/>
+        </p:nvSpPr>
+        <p:spPr>
+          <a:xfrm>
+            <a:off x="822960" y="1828800"/>
+            <a:ext cx="10545775" cy="2926080"/>
+          </a:xfrm>
+          <a:prstGeom prst="rect">
+            <a:avLst/>
+          </a:prstGeom>
+          <a:noFill/>
+        </p:spPr>
+        <p:txBody>
+          <a:bodyPr wrap="square" anchor="t">
+            <a:spAutoFit/>
+          </a:bodyPr>
+          <a:lstStyle/>
+          <a:p>
+            <a:pPr algn="l">
+              <a:lnSpc>
+                <a:spcPct val="160000"/>
+              </a:lnSpc>
+            </a:pPr>
+            <a:r>
+              <a:rPr sz="2400" b="0">
+                <a:solidFill>
+                  <a:srgbClr val="1F2937"/>
+                </a:solidFill>
+                <a:latin typeface="맑은 고딕"/>
+              </a:rPr>
+              <a:t>· 개인정보와 민감정보는 한 번 입력하면 되돌리기 어렵고, AI 서비스에는 사용 가능 연령과 학교의 기준이 있다.</a:t>
+            </a:r>
+          </a:p>
+          <a:p>
+            <a:pPr algn="l">
+              <a:lnSpc>
+                <a:spcPct val="160000"/>
+              </a:lnSpc>
+            </a:pPr>
+            <a:r>
+              <a:rPr sz="2400" b="0">
+                <a:solidFill>
+                  <a:srgbClr val="1F2937"/>
+                </a:solidFill>
+                <a:latin typeface="맑은 고딕"/>
+              </a:rPr>
+              <a:t>· AI 활용 여부와 방식을 스스로 선택할 수 있는 권리가 나에게 있다.</a:t>
+            </a:r>
+          </a:p>
+        </p:txBody>
+      </p:sp>
+      <p:sp>
+        <p:nvSpPr>
+          <p:cNvPr id="5" name="TextBox 4"/>
+          <p:cNvSpPr txBox="1"/>
+          <p:nvPr/>
+        </p:nvSpPr>
+        <p:spPr>
+          <a:xfrm>
+            <a:off x="822960" y="5943600"/>
+            <a:ext cx="10545775" cy="457200"/>
+          </a:xfrm>
+          <a:prstGeom prst="rect">
+            <a:avLst/>
+          </a:prstGeom>
+          <a:noFill/>
+        </p:spPr>
+        <p:txBody>
+          <a:bodyPr wrap="square" anchor="t">
+            <a:spAutoFit/>
+          </a:bodyPr>
+          <a:lstStyle/>
+          <a:p>
+            <a:pPr algn="l">
+              <a:lnSpc>
+                <a:spcPct val="125000"/>
+              </a:lnSpc>
+            </a:pPr>
+            <a:r>
+              <a:rPr sz="1200" b="0">
+                <a:solidFill>
+                  <a:srgbClr val="6B7280"/>
+                </a:solidFill>
+                <a:latin typeface="맑은 고딕"/>
+              </a:rPr>
+              <a:t>2026년 티처스랩 5기 교사연구회 A.N.D · CC BY-NC-SA</a:t>
+            </a:r>
+          </a:p>
+        </p:txBody>
+      </p:sp>
+    </p:spTree>
+  </p:cSld>
+  <p:clrMapOvr>
+    <a:masterClrMapping/>
+  </p:clrMapOvr>
+</p:sld>
+</file>
+
 <file path=ppt/slides/slide3.xml><?xml version="1.0" encoding="utf-8"?>
 <p:sld xmlns:a="http://schemas.openxmlformats.org/drawingml/2006/main" xmlns:p="http://schemas.openxmlformats.org/presentationml/2006/main" xmlns:r="http://schemas.openxmlformats.org/officeDocument/2006/relationships">
   <p:cSld>
@@ -5949,7 +8322,7 @@
                 </a:solidFill>
                 <a:latin typeface="맑은 고딕"/>
               </a:rPr>
-              <a:t>· 카드 세 칸으로 나누기</a:t>
+              <a:t>· 카드 3칸 분류판</a:t>
             </a:r>
           </a:p>
           <a:p>
@@ -5965,7 +8338,7 @@
                 </a:solidFill>
                 <a:latin typeface="맑은 고딕"/>
               </a:rPr>
-              <a:t>· 까닭 쓰기</a:t>
+              <a:t>· 근거 쓰기</a:t>
             </a:r>
           </a:p>
           <a:p>

--- a/out/site/files/WISE_L04_수업.pptx
+++ b/out/site/files/WISE_L04_수업.pptx
@@ -5338,7 +5338,7 @@
                 </a:solidFill>
                 <a:latin typeface="맑은 고딕"/>
               </a:rPr>
-              <a:t>2026년 티처스랩 5기 교사연구회 A.N.D · CC BY-NC-SA</a:t>
+              <a:t>2026년 G-DEAL A.N.D · CC BY-NC-SA</a:t>
             </a:r>
           </a:p>
         </p:txBody>
@@ -7512,7 +7512,7 @@
                 </a:solidFill>
                 <a:latin typeface="맑은 고딕"/>
               </a:rPr>
-              <a:t>2026년 티처스랩 5기 교사연구회 A.N.D · CC BY-NC-SA</a:t>
+              <a:t>2026년 G-DEAL A.N.D · CC BY-NC-SA</a:t>
             </a:r>
           </a:p>
         </p:txBody>
